--- a/dag/DAG_Editable.pptx
+++ b/dag/DAG_Editable.pptx
@@ -5052,7 +5052,7 @@
                 </a:solidFill>
                 <a:latin typeface="Calibri"/>
               </a:rPr>
-              <a:t>Paths in this diagram — 12 total, all blocked or estimated once the plan in Section 7 is followed:
+              <a:t>Paths in this diagram — 12 total, all blocked or estimated once the propensity-score adjustment is applied:
 •  1 causal path:  T → Y  (the effect being estimated)
 •  11 backdoor paths, one per confounder Xi:  T ← Xi → Y  (each is blocked by conditioning on Xi in the propensity-score model)</a:t>
             </a:r>

--- a/dag/DAG_Editable.pptx
+++ b/dag/DAG_Editable.pptx
@@ -3119,7 +3119,7 @@
                 </a:solidFill>
                 <a:latin typeface="Calibri"/>
               </a:rPr>
-              <a:t>Identification DAG — 11 Backdoor Paths + 1 Causal Path (Maternal Smoking → Preterm Birth)</a:t>
+              <a:t>Identification DAG — 10 Backdoor Paths + 1 Causal Path (Maternal Smoking → Preterm Birth)</a:t>
             </a:r>
           </a:p>
         </p:txBody>
@@ -3314,7 +3314,7 @@
         </p:nvSpPr>
         <p:spPr>
           <a:xfrm>
-            <a:off x="1494212" y="1005840"/>
+            <a:off x="1586484" y="1005840"/>
             <a:ext cx="2331720" cy="960120"/>
           </a:xfrm>
           <a:prstGeom prst="roundRect">
@@ -3373,7 +3373,7 @@
         </p:nvSpPr>
         <p:spPr>
           <a:xfrm>
-            <a:off x="3339638" y="2331720"/>
+            <a:off x="3616451" y="2331720"/>
             <a:ext cx="2331720" cy="960120"/>
           </a:xfrm>
           <a:prstGeom prst="roundRect">
@@ -3432,7 +3432,7 @@
         </p:nvSpPr>
         <p:spPr>
           <a:xfrm>
-            <a:off x="5185063" y="1005840"/>
+            <a:off x="5646419" y="1005840"/>
             <a:ext cx="2331720" cy="960120"/>
           </a:xfrm>
           <a:prstGeom prst="roundRect">
@@ -3491,7 +3491,7 @@
         </p:nvSpPr>
         <p:spPr>
           <a:xfrm>
-            <a:off x="7030489" y="2331720"/>
+            <a:off x="7676388" y="2331720"/>
             <a:ext cx="2331720" cy="960120"/>
           </a:xfrm>
           <a:prstGeom prst="roundRect">
@@ -3550,7 +3550,7 @@
         </p:nvSpPr>
         <p:spPr>
           <a:xfrm>
-            <a:off x="8875914" y="1005840"/>
+            <a:off x="9706355" y="1005840"/>
             <a:ext cx="2331720" cy="960120"/>
           </a:xfrm>
           <a:prstGeom prst="roundRect">
@@ -3625,7 +3625,7 @@
         </p:nvSpPr>
         <p:spPr>
           <a:xfrm>
-            <a:off x="10721340" y="2331720"/>
+            <a:off x="11736324" y="2331720"/>
             <a:ext cx="2331720" cy="960120"/>
           </a:xfrm>
           <a:prstGeom prst="roundRect">
@@ -3671,7 +3671,7 @@
                 </a:solidFill>
                 <a:latin typeface="Calibri"/>
               </a:rPr>
-              <a:t>Insurance /</a:t>
+              <a:t>WIC</a:t>
             </a:r>
           </a:p>
           <a:p>
@@ -3687,7 +3687,7 @@
                 </a:solidFill>
                 <a:latin typeface="Calibri"/>
               </a:rPr>
-              <a:t>payer type</a:t>
+              <a:t>participation</a:t>
             </a:r>
           </a:p>
         </p:txBody>
@@ -3700,7 +3700,7 @@
         </p:nvSpPr>
         <p:spPr>
           <a:xfrm>
-            <a:off x="12566765" y="1005840"/>
+            <a:off x="13766291" y="1005840"/>
             <a:ext cx="2331720" cy="960120"/>
           </a:xfrm>
           <a:prstGeom prst="roundRect">
@@ -3746,7 +3746,7 @@
                 </a:solidFill>
                 <a:latin typeface="Calibri"/>
               </a:rPr>
-              <a:t>WIC</a:t>
+              <a:t>Pre-pregnancy</a:t>
             </a:r>
           </a:p>
           <a:p>
@@ -3762,7 +3762,7 @@
                 </a:solidFill>
                 <a:latin typeface="Calibri"/>
               </a:rPr>
-              <a:t>participation</a:t>
+              <a:t>diabetes</a:t>
             </a:r>
           </a:p>
         </p:txBody>
@@ -3775,7 +3775,7 @@
         </p:nvSpPr>
         <p:spPr>
           <a:xfrm>
-            <a:off x="14412190" y="2331720"/>
+            <a:off x="15796259" y="2331720"/>
             <a:ext cx="2331720" cy="960120"/>
           </a:xfrm>
           <a:prstGeom prst="roundRect">
@@ -3837,7 +3837,7 @@
                 </a:solidFill>
                 <a:latin typeface="Calibri"/>
               </a:rPr>
-              <a:t>diabetes</a:t>
+              <a:t>hypertension</a:t>
             </a:r>
           </a:p>
         </p:txBody>
@@ -3850,7 +3850,7 @@
         </p:nvSpPr>
         <p:spPr>
           <a:xfrm>
-            <a:off x="16257616" y="1005840"/>
+            <a:off x="17826227" y="1005840"/>
             <a:ext cx="2331720" cy="960120"/>
           </a:xfrm>
           <a:prstGeom prst="roundRect">
@@ -3896,7 +3896,7 @@
                 </a:solidFill>
                 <a:latin typeface="Calibri"/>
               </a:rPr>
-              <a:t>Pre-pregnancy</a:t>
+              <a:t>Prior preterm</a:t>
             </a:r>
           </a:p>
           <a:p>
@@ -3912,7 +3912,7 @@
                 </a:solidFill>
                 <a:latin typeface="Calibri"/>
               </a:rPr>
-              <a:t>hypertension</a:t>
+              <a:t>birth</a:t>
             </a:r>
           </a:p>
         </p:txBody>
@@ -3925,7 +3925,7 @@
         </p:nvSpPr>
         <p:spPr>
           <a:xfrm>
-            <a:off x="18103041" y="2331720"/>
+            <a:off x="19856196" y="2331720"/>
             <a:ext cx="2331720" cy="960120"/>
           </a:xfrm>
           <a:prstGeom prst="roundRect">
@@ -3971,7 +3971,7 @@
                 </a:solidFill>
                 <a:latin typeface="Calibri"/>
               </a:rPr>
-              <a:t>Prior preterm</a:t>
+              <a:t>Prenatal care</a:t>
             </a:r>
           </a:p>
           <a:p>
@@ -3987,81 +3987,6 @@
                 </a:solidFill>
                 <a:latin typeface="Calibri"/>
               </a:rPr>
-              <a:t>birth</a:t>
-            </a:r>
-          </a:p>
-        </p:txBody>
-      </p:sp>
-      <p:sp>
-        <p:nvSpPr>
-          <p:cNvPr id="15" name="Rounded Rectangle 14"/>
-          <p:cNvSpPr/>
-          <p:nvPr/>
-        </p:nvSpPr>
-        <p:spPr>
-          <a:xfrm>
-            <a:off x="19948467" y="1005840"/>
-            <a:ext cx="2331720" cy="960120"/>
-          </a:xfrm>
-          <a:prstGeom prst="roundRect">
-            <a:avLst/>
-          </a:prstGeom>
-          <a:solidFill>
-            <a:srgbClr val="EEF2F7"/>
-          </a:solidFill>
-          <a:ln w="19050">
-            <a:solidFill>
-              <a:srgbClr val="6B7F99"/>
-            </a:solidFill>
-          </a:ln>
-          <a:effectLst/>
-        </p:spPr>
-        <p:style>
-          <a:lnRef idx="1">
-            <a:schemeClr val="accent1"/>
-          </a:lnRef>
-          <a:fillRef idx="3">
-            <a:schemeClr val="accent1"/>
-          </a:fillRef>
-          <a:effectRef idx="2">
-            <a:schemeClr val="accent1"/>
-          </a:effectRef>
-          <a:fontRef idx="minor">
-            <a:schemeClr val="lt1"/>
-          </a:fontRef>
-        </p:style>
-        <p:txBody>
-          <a:bodyPr rtlCol="0" anchor="ctr" wrap="square" lIns="54864" rIns="54864" tIns="36576" bIns="36576"/>
-          <a:lstStyle/>
-          <a:p>
-            <a:pPr algn="ctr">
-              <a:lnSpc>
-                <a:spcPct val="100000"/>
-              </a:lnSpc>
-            </a:pPr>
-            <a:r>
-              <a:rPr sz="1200" b="0">
-                <a:solidFill>
-                  <a:srgbClr val="1A2233"/>
-                </a:solidFill>
-                <a:latin typeface="Calibri"/>
-              </a:rPr>
-              <a:t>Prenatal care</a:t>
-            </a:r>
-          </a:p>
-          <a:p>
-            <a:pPr algn="ctr">
-              <a:lnSpc>
-                <a:spcPct val="100000"/>
-              </a:lnSpc>
-            </a:pPr>
-            <a:r>
-              <a:rPr sz="1200" b="0">
-                <a:solidFill>
-                  <a:srgbClr val="1A2233"/>
-                </a:solidFill>
-                <a:latin typeface="Calibri"/>
-              </a:rPr>
               <a:t>timing</a:t>
             </a:r>
           </a:p>
@@ -4069,7 +3994,7 @@
       </p:sp>
       <p:cxnSp>
         <p:nvCxnSpPr>
-          <p:cNvPr id="16" name="Connector 15"/>
+          <p:cNvPr id="15" name="Connector 14"/>
           <p:cNvCxnSpPr>
             <a:stCxn id="5" idx="1"/>
             <a:endCxn id="3" idx="0"/>
@@ -4078,8 +4003,48 @@
         </p:nvCxnSpPr>
         <p:spPr>
           <a:xfrm>
-            <a:off x="1494212" y="1485900"/>
-            <a:ext cx="426028" cy="3406140"/>
+            <a:off x="1586484" y="1485900"/>
+            <a:ext cx="333756" cy="3406140"/>
+          </a:xfrm>
+          <a:prstGeom prst="line">
+            <a:avLst/>
+          </a:prstGeom>
+          <a:ln w="12700">
+            <a:solidFill>
+              <a:srgbClr val="9AA5B1"/>
+            </a:solidFill>
+            <a:tailEnd type="triangle" w="med" len="med"/>
+          </a:ln>
+          <a:effectLst/>
+        </p:spPr>
+        <p:style>
+          <a:lnRef idx="2">
+            <a:schemeClr val="accent1"/>
+          </a:lnRef>
+          <a:fillRef idx="0">
+            <a:schemeClr val="accent1"/>
+          </a:fillRef>
+          <a:effectRef idx="1">
+            <a:schemeClr val="accent1"/>
+          </a:effectRef>
+          <a:fontRef idx="minor">
+            <a:schemeClr val="tx1"/>
+          </a:fontRef>
+        </p:style>
+      </p:cxnSp>
+      <p:cxnSp>
+        <p:nvCxnSpPr>
+          <p:cNvPr id="16" name="Connector 15"/>
+          <p:cNvCxnSpPr>
+            <a:stCxn id="5" idx="1"/>
+            <a:endCxn id="4" idx="0"/>
+          </p:cNvCxnSpPr>
+          <p:nvPr/>
+        </p:nvCxnSpPr>
+        <p:spPr>
+          <a:xfrm>
+            <a:off x="1586484" y="1485900"/>
+            <a:ext cx="20084796" cy="3406140"/>
           </a:xfrm>
           <a:prstGeom prst="line">
             <a:avLst/>
@@ -4111,15 +4076,15 @@
         <p:nvCxnSpPr>
           <p:cNvPr id="17" name="Connector 16"/>
           <p:cNvCxnSpPr>
-            <a:stCxn id="5" idx="1"/>
-            <a:endCxn id="4" idx="0"/>
+            <a:stCxn id="6" idx="1"/>
+            <a:endCxn id="3" idx="0"/>
           </p:cNvCxnSpPr>
           <p:nvPr/>
         </p:nvCxnSpPr>
         <p:spPr>
-          <a:xfrm>
-            <a:off x="1494212" y="1485900"/>
-            <a:ext cx="20177068" cy="3406140"/>
+          <a:xfrm flipH="1">
+            <a:off x="1920240" y="2811780"/>
+            <a:ext cx="1696211" cy="2080260"/>
           </a:xfrm>
           <a:prstGeom prst="line">
             <a:avLst/>
@@ -4152,14 +4117,14 @@
           <p:cNvPr id="18" name="Connector 17"/>
           <p:cNvCxnSpPr>
             <a:stCxn id="6" idx="1"/>
-            <a:endCxn id="3" idx="0"/>
+            <a:endCxn id="4" idx="0"/>
           </p:cNvCxnSpPr>
           <p:nvPr/>
         </p:nvCxnSpPr>
         <p:spPr>
-          <a:xfrm flipH="1">
-            <a:off x="1920240" y="2811780"/>
-            <a:ext cx="1419398" cy="2080260"/>
+          <a:xfrm>
+            <a:off x="3616451" y="2811780"/>
+            <a:ext cx="18054829" cy="2080260"/>
           </a:xfrm>
           <a:prstGeom prst="line">
             <a:avLst/>
@@ -4191,15 +4156,15 @@
         <p:nvCxnSpPr>
           <p:cNvPr id="19" name="Connector 18"/>
           <p:cNvCxnSpPr>
-            <a:stCxn id="6" idx="1"/>
-            <a:endCxn id="4" idx="0"/>
+            <a:stCxn id="7" idx="1"/>
+            <a:endCxn id="3" idx="0"/>
           </p:cNvCxnSpPr>
           <p:nvPr/>
         </p:nvCxnSpPr>
         <p:spPr>
-          <a:xfrm>
-            <a:off x="3339638" y="2811780"/>
-            <a:ext cx="18331642" cy="2080260"/>
+          <a:xfrm flipH="1">
+            <a:off x="1920240" y="1485900"/>
+            <a:ext cx="3726179" cy="3406140"/>
           </a:xfrm>
           <a:prstGeom prst="line">
             <a:avLst/>
@@ -4232,14 +4197,14 @@
           <p:cNvPr id="20" name="Connector 19"/>
           <p:cNvCxnSpPr>
             <a:stCxn id="7" idx="1"/>
-            <a:endCxn id="3" idx="0"/>
+            <a:endCxn id="4" idx="0"/>
           </p:cNvCxnSpPr>
           <p:nvPr/>
         </p:nvCxnSpPr>
         <p:spPr>
-          <a:xfrm flipH="1">
-            <a:off x="1920240" y="1485900"/>
-            <a:ext cx="3264823" cy="3406140"/>
+          <a:xfrm>
+            <a:off x="5646419" y="1485900"/>
+            <a:ext cx="16024861" cy="3406140"/>
           </a:xfrm>
           <a:prstGeom prst="line">
             <a:avLst/>
@@ -4271,15 +4236,15 @@
         <p:nvCxnSpPr>
           <p:cNvPr id="21" name="Connector 20"/>
           <p:cNvCxnSpPr>
-            <a:stCxn id="7" idx="1"/>
-            <a:endCxn id="4" idx="0"/>
+            <a:stCxn id="8" idx="1"/>
+            <a:endCxn id="3" idx="0"/>
           </p:cNvCxnSpPr>
           <p:nvPr/>
         </p:nvCxnSpPr>
         <p:spPr>
-          <a:xfrm>
-            <a:off x="5185063" y="1485900"/>
-            <a:ext cx="16486217" cy="3406140"/>
+          <a:xfrm flipH="1">
+            <a:off x="1920240" y="2811780"/>
+            <a:ext cx="5756148" cy="2080260"/>
           </a:xfrm>
           <a:prstGeom prst="line">
             <a:avLst/>
@@ -4312,14 +4277,14 @@
           <p:cNvPr id="22" name="Connector 21"/>
           <p:cNvCxnSpPr>
             <a:stCxn id="8" idx="1"/>
-            <a:endCxn id="3" idx="0"/>
+            <a:endCxn id="4" idx="0"/>
           </p:cNvCxnSpPr>
           <p:nvPr/>
         </p:nvCxnSpPr>
         <p:spPr>
-          <a:xfrm flipH="1">
-            <a:off x="1920240" y="2811780"/>
-            <a:ext cx="5110249" cy="2080260"/>
+          <a:xfrm>
+            <a:off x="7676388" y="2811780"/>
+            <a:ext cx="13994892" cy="2080260"/>
           </a:xfrm>
           <a:prstGeom prst="line">
             <a:avLst/>
@@ -4351,15 +4316,15 @@
         <p:nvCxnSpPr>
           <p:cNvPr id="23" name="Connector 22"/>
           <p:cNvCxnSpPr>
-            <a:stCxn id="8" idx="1"/>
-            <a:endCxn id="4" idx="0"/>
+            <a:stCxn id="9" idx="1"/>
+            <a:endCxn id="3" idx="0"/>
           </p:cNvCxnSpPr>
           <p:nvPr/>
         </p:nvCxnSpPr>
         <p:spPr>
-          <a:xfrm>
-            <a:off x="7030489" y="2811780"/>
-            <a:ext cx="14640791" cy="2080260"/>
+          <a:xfrm flipH="1">
+            <a:off x="1920240" y="1485900"/>
+            <a:ext cx="7786115" cy="3406140"/>
           </a:xfrm>
           <a:prstGeom prst="line">
             <a:avLst/>
@@ -4392,14 +4357,14 @@
           <p:cNvPr id="24" name="Connector 23"/>
           <p:cNvCxnSpPr>
             <a:stCxn id="9" idx="1"/>
-            <a:endCxn id="3" idx="0"/>
+            <a:endCxn id="4" idx="0"/>
           </p:cNvCxnSpPr>
           <p:nvPr/>
         </p:nvCxnSpPr>
         <p:spPr>
-          <a:xfrm flipH="1">
-            <a:off x="1920240" y="1485900"/>
-            <a:ext cx="6955674" cy="3406140"/>
+          <a:xfrm>
+            <a:off x="9706355" y="1485900"/>
+            <a:ext cx="11964925" cy="3406140"/>
           </a:xfrm>
           <a:prstGeom prst="line">
             <a:avLst/>
@@ -4431,15 +4396,15 @@
         <p:nvCxnSpPr>
           <p:cNvPr id="25" name="Connector 24"/>
           <p:cNvCxnSpPr>
-            <a:stCxn id="9" idx="1"/>
-            <a:endCxn id="4" idx="0"/>
+            <a:stCxn id="10" idx="1"/>
+            <a:endCxn id="3" idx="0"/>
           </p:cNvCxnSpPr>
           <p:nvPr/>
         </p:nvCxnSpPr>
         <p:spPr>
-          <a:xfrm>
-            <a:off x="8875914" y="1485900"/>
-            <a:ext cx="12795366" cy="3406140"/>
+          <a:xfrm flipH="1">
+            <a:off x="1920240" y="2811780"/>
+            <a:ext cx="9816084" cy="2080260"/>
           </a:xfrm>
           <a:prstGeom prst="line">
             <a:avLst/>
@@ -4472,14 +4437,14 @@
           <p:cNvPr id="26" name="Connector 25"/>
           <p:cNvCxnSpPr>
             <a:stCxn id="10" idx="1"/>
-            <a:endCxn id="3" idx="0"/>
+            <a:endCxn id="4" idx="0"/>
           </p:cNvCxnSpPr>
           <p:nvPr/>
         </p:nvCxnSpPr>
         <p:spPr>
-          <a:xfrm flipH="1">
-            <a:off x="1920240" y="2811780"/>
-            <a:ext cx="8801100" cy="2080260"/>
+          <a:xfrm>
+            <a:off x="11736324" y="2811780"/>
+            <a:ext cx="9934956" cy="2080260"/>
           </a:xfrm>
           <a:prstGeom prst="line">
             <a:avLst/>
@@ -4511,15 +4476,15 @@
         <p:nvCxnSpPr>
           <p:cNvPr id="27" name="Connector 26"/>
           <p:cNvCxnSpPr>
-            <a:stCxn id="10" idx="1"/>
-            <a:endCxn id="4" idx="0"/>
+            <a:stCxn id="11" idx="1"/>
+            <a:endCxn id="3" idx="0"/>
           </p:cNvCxnSpPr>
           <p:nvPr/>
         </p:nvCxnSpPr>
         <p:spPr>
-          <a:xfrm>
-            <a:off x="10721340" y="2811780"/>
-            <a:ext cx="10949940" cy="2080260"/>
+          <a:xfrm flipH="1">
+            <a:off x="1920240" y="1485900"/>
+            <a:ext cx="11846051" cy="3406140"/>
           </a:xfrm>
           <a:prstGeom prst="line">
             <a:avLst/>
@@ -4552,14 +4517,14 @@
           <p:cNvPr id="28" name="Connector 27"/>
           <p:cNvCxnSpPr>
             <a:stCxn id="11" idx="1"/>
-            <a:endCxn id="3" idx="0"/>
+            <a:endCxn id="4" idx="0"/>
           </p:cNvCxnSpPr>
           <p:nvPr/>
         </p:nvCxnSpPr>
         <p:spPr>
-          <a:xfrm flipH="1">
-            <a:off x="1920240" y="1485900"/>
-            <a:ext cx="10646525" cy="3406140"/>
+          <a:xfrm>
+            <a:off x="13766291" y="1485900"/>
+            <a:ext cx="7904989" cy="3406140"/>
           </a:xfrm>
           <a:prstGeom prst="line">
             <a:avLst/>
@@ -4591,15 +4556,15 @@
         <p:nvCxnSpPr>
           <p:cNvPr id="29" name="Connector 28"/>
           <p:cNvCxnSpPr>
-            <a:stCxn id="11" idx="1"/>
-            <a:endCxn id="4" idx="0"/>
+            <a:stCxn id="12" idx="1"/>
+            <a:endCxn id="3" idx="0"/>
           </p:cNvCxnSpPr>
           <p:nvPr/>
         </p:nvCxnSpPr>
         <p:spPr>
-          <a:xfrm>
-            <a:off x="12566765" y="1485900"/>
-            <a:ext cx="9104515" cy="3406140"/>
+          <a:xfrm flipH="1">
+            <a:off x="1920240" y="2811780"/>
+            <a:ext cx="13876019" cy="2080260"/>
           </a:xfrm>
           <a:prstGeom prst="line">
             <a:avLst/>
@@ -4632,14 +4597,14 @@
           <p:cNvPr id="30" name="Connector 29"/>
           <p:cNvCxnSpPr>
             <a:stCxn id="12" idx="1"/>
-            <a:endCxn id="3" idx="0"/>
+            <a:endCxn id="4" idx="0"/>
           </p:cNvCxnSpPr>
           <p:nvPr/>
         </p:nvCxnSpPr>
         <p:spPr>
-          <a:xfrm flipH="1">
-            <a:off x="1920240" y="2811780"/>
-            <a:ext cx="12491950" cy="2080260"/>
+          <a:xfrm>
+            <a:off x="15796259" y="2811780"/>
+            <a:ext cx="5875021" cy="2080260"/>
           </a:xfrm>
           <a:prstGeom prst="line">
             <a:avLst/>
@@ -4671,15 +4636,15 @@
         <p:nvCxnSpPr>
           <p:cNvPr id="31" name="Connector 30"/>
           <p:cNvCxnSpPr>
-            <a:stCxn id="12" idx="1"/>
-            <a:endCxn id="4" idx="0"/>
+            <a:stCxn id="13" idx="1"/>
+            <a:endCxn id="3" idx="0"/>
           </p:cNvCxnSpPr>
           <p:nvPr/>
         </p:nvCxnSpPr>
         <p:spPr>
-          <a:xfrm>
-            <a:off x="14412190" y="2811780"/>
-            <a:ext cx="7259090" cy="2080260"/>
+          <a:xfrm flipH="1">
+            <a:off x="1920240" y="1485900"/>
+            <a:ext cx="15905987" cy="3406140"/>
           </a:xfrm>
           <a:prstGeom prst="line">
             <a:avLst/>
@@ -4712,14 +4677,14 @@
           <p:cNvPr id="32" name="Connector 31"/>
           <p:cNvCxnSpPr>
             <a:stCxn id="13" idx="1"/>
-            <a:endCxn id="3" idx="0"/>
+            <a:endCxn id="4" idx="0"/>
           </p:cNvCxnSpPr>
           <p:nvPr/>
         </p:nvCxnSpPr>
         <p:spPr>
-          <a:xfrm flipH="1">
-            <a:off x="1920240" y="1485900"/>
-            <a:ext cx="14337376" cy="3406140"/>
+          <a:xfrm>
+            <a:off x="17826227" y="1485900"/>
+            <a:ext cx="3845053" cy="3406140"/>
           </a:xfrm>
           <a:prstGeom prst="line">
             <a:avLst/>
@@ -4751,15 +4716,15 @@
         <p:nvCxnSpPr>
           <p:cNvPr id="33" name="Connector 32"/>
           <p:cNvCxnSpPr>
-            <a:stCxn id="13" idx="1"/>
-            <a:endCxn id="4" idx="0"/>
+            <a:stCxn id="14" idx="1"/>
+            <a:endCxn id="3" idx="0"/>
           </p:cNvCxnSpPr>
           <p:nvPr/>
         </p:nvCxnSpPr>
         <p:spPr>
-          <a:xfrm>
-            <a:off x="16257616" y="1485900"/>
-            <a:ext cx="5413664" cy="3406140"/>
+          <a:xfrm flipH="1">
+            <a:off x="1920240" y="2811780"/>
+            <a:ext cx="17935956" cy="2080260"/>
           </a:xfrm>
           <a:prstGeom prst="line">
             <a:avLst/>
@@ -4792,14 +4757,14 @@
           <p:cNvPr id="34" name="Connector 33"/>
           <p:cNvCxnSpPr>
             <a:stCxn id="14" idx="1"/>
-            <a:endCxn id="3" idx="0"/>
+            <a:endCxn id="4" idx="0"/>
           </p:cNvCxnSpPr>
           <p:nvPr/>
         </p:nvCxnSpPr>
         <p:spPr>
-          <a:xfrm flipH="1">
-            <a:off x="1920240" y="2811780"/>
-            <a:ext cx="16182801" cy="2080260"/>
+          <a:xfrm>
+            <a:off x="19856196" y="2811780"/>
+            <a:ext cx="1815084" cy="2080260"/>
           </a:xfrm>
           <a:prstGeom prst="line">
             <a:avLst/>
@@ -4831,126 +4796,6 @@
         <p:nvCxnSpPr>
           <p:cNvPr id="35" name="Connector 34"/>
           <p:cNvCxnSpPr>
-            <a:stCxn id="14" idx="1"/>
-            <a:endCxn id="4" idx="0"/>
-          </p:cNvCxnSpPr>
-          <p:nvPr/>
-        </p:nvCxnSpPr>
-        <p:spPr>
-          <a:xfrm>
-            <a:off x="18103041" y="2811780"/>
-            <a:ext cx="3568239" cy="2080260"/>
-          </a:xfrm>
-          <a:prstGeom prst="line">
-            <a:avLst/>
-          </a:prstGeom>
-          <a:ln w="12700">
-            <a:solidFill>
-              <a:srgbClr val="9AA5B1"/>
-            </a:solidFill>
-            <a:tailEnd type="triangle" w="med" len="med"/>
-          </a:ln>
-          <a:effectLst/>
-        </p:spPr>
-        <p:style>
-          <a:lnRef idx="2">
-            <a:schemeClr val="accent1"/>
-          </a:lnRef>
-          <a:fillRef idx="0">
-            <a:schemeClr val="accent1"/>
-          </a:fillRef>
-          <a:effectRef idx="1">
-            <a:schemeClr val="accent1"/>
-          </a:effectRef>
-          <a:fontRef idx="minor">
-            <a:schemeClr val="tx1"/>
-          </a:fontRef>
-        </p:style>
-      </p:cxnSp>
-      <p:cxnSp>
-        <p:nvCxnSpPr>
-          <p:cNvPr id="36" name="Connector 35"/>
-          <p:cNvCxnSpPr>
-            <a:stCxn id="15" idx="1"/>
-            <a:endCxn id="3" idx="0"/>
-          </p:cNvCxnSpPr>
-          <p:nvPr/>
-        </p:nvCxnSpPr>
-        <p:spPr>
-          <a:xfrm flipH="1">
-            <a:off x="1920240" y="1485900"/>
-            <a:ext cx="18028227" cy="3406140"/>
-          </a:xfrm>
-          <a:prstGeom prst="line">
-            <a:avLst/>
-          </a:prstGeom>
-          <a:ln w="12700">
-            <a:solidFill>
-              <a:srgbClr val="9AA5B1"/>
-            </a:solidFill>
-            <a:tailEnd type="triangle" w="med" len="med"/>
-          </a:ln>
-          <a:effectLst/>
-        </p:spPr>
-        <p:style>
-          <a:lnRef idx="2">
-            <a:schemeClr val="accent1"/>
-          </a:lnRef>
-          <a:fillRef idx="0">
-            <a:schemeClr val="accent1"/>
-          </a:fillRef>
-          <a:effectRef idx="1">
-            <a:schemeClr val="accent1"/>
-          </a:effectRef>
-          <a:fontRef idx="minor">
-            <a:schemeClr val="tx1"/>
-          </a:fontRef>
-        </p:style>
-      </p:cxnSp>
-      <p:cxnSp>
-        <p:nvCxnSpPr>
-          <p:cNvPr id="37" name="Connector 36"/>
-          <p:cNvCxnSpPr>
-            <a:stCxn id="15" idx="1"/>
-            <a:endCxn id="4" idx="0"/>
-          </p:cNvCxnSpPr>
-          <p:nvPr/>
-        </p:nvCxnSpPr>
-        <p:spPr>
-          <a:xfrm>
-            <a:off x="19948467" y="1485900"/>
-            <a:ext cx="1722813" cy="3406140"/>
-          </a:xfrm>
-          <a:prstGeom prst="line">
-            <a:avLst/>
-          </a:prstGeom>
-          <a:ln w="12700">
-            <a:solidFill>
-              <a:srgbClr val="9AA5B1"/>
-            </a:solidFill>
-            <a:tailEnd type="triangle" w="med" len="med"/>
-          </a:ln>
-          <a:effectLst/>
-        </p:spPr>
-        <p:style>
-          <a:lnRef idx="2">
-            <a:schemeClr val="accent1"/>
-          </a:lnRef>
-          <a:fillRef idx="0">
-            <a:schemeClr val="accent1"/>
-          </a:fillRef>
-          <a:effectRef idx="1">
-            <a:schemeClr val="accent1"/>
-          </a:effectRef>
-          <a:fontRef idx="minor">
-            <a:schemeClr val="tx1"/>
-          </a:fontRef>
-        </p:style>
-      </p:cxnSp>
-      <p:cxnSp>
-        <p:nvCxnSpPr>
-          <p:cNvPr id="38" name="Connector 37"/>
-          <p:cNvCxnSpPr>
             <a:stCxn id="3" idx="2"/>
             <a:endCxn id="4" idx="3"/>
           </p:cNvCxnSpPr>
@@ -4989,14 +4834,121 @@
       </p:cxnSp>
       <p:sp>
         <p:nvSpPr>
+          <p:cNvPr id="36" name="TextBox 35"/>
+          <p:cNvSpPr txBox="1"/>
+          <p:nvPr/>
+        </p:nvSpPr>
+        <p:spPr>
+          <a:xfrm>
+            <a:off x="8961120" y="6537960"/>
+            <a:ext cx="5852160" cy="365760"/>
+          </a:xfrm>
+          <a:prstGeom prst="rect">
+            <a:avLst/>
+          </a:prstGeom>
+          <a:noFill/>
+        </p:spPr>
+        <p:txBody>
+          <a:bodyPr wrap="square">
+            <a:spAutoFit/>
+          </a:bodyPr>
+          <a:lstStyle/>
+          <a:p>
+            <a:pPr algn="l"/>
+            <a:r>
+              <a:rPr sz="1300" i="1">
+                <a:solidFill>
+                  <a:srgbClr val="C1611A"/>
+                </a:solidFill>
+                <a:latin typeface="Calibri"/>
+              </a:rPr>
+              <a:t>Causal path of interest (odds ratio, adjusted / weighted)</a:t>
+            </a:r>
+          </a:p>
+        </p:txBody>
+      </p:sp>
+      <p:sp>
+        <p:nvSpPr>
+          <p:cNvPr id="37" name="TextBox 36"/>
+          <p:cNvSpPr txBox="1"/>
+          <p:nvPr/>
+        </p:nvSpPr>
+        <p:spPr>
+          <a:xfrm>
+            <a:off x="548640" y="7040880"/>
+            <a:ext cx="22677120" cy="1188720"/>
+          </a:xfrm>
+          <a:prstGeom prst="rect">
+            <a:avLst/>
+          </a:prstGeom>
+          <a:noFill/>
+        </p:spPr>
+        <p:txBody>
+          <a:bodyPr wrap="square">
+            <a:spAutoFit/>
+          </a:bodyPr>
+          <a:lstStyle/>
+          <a:p>
+            <a:pPr algn="l"/>
+            <a:r>
+              <a:rPr sz="1350" i="0">
+                <a:solidFill>
+                  <a:srgbClr val="1A2233"/>
+                </a:solidFill>
+                <a:latin typeface="Calibri"/>
+              </a:rPr>
+              <a:t>Paths in this diagram — 11 total, all blocked or estimated once the propensity-score adjustment is applied:
+•  1 causal path:  T → Y  (the effect being estimated)
+•  10 backdoor paths, one per confounder Xi:  T ← Xi → Y  (each is blocked by conditioning on Xi in the propensity-score model)</a:t>
+            </a:r>
+          </a:p>
+        </p:txBody>
+      </p:sp>
+      <p:sp>
+        <p:nvSpPr>
+          <p:cNvPr id="38" name="TextBox 37"/>
+          <p:cNvSpPr txBox="1"/>
+          <p:nvPr/>
+        </p:nvSpPr>
+        <p:spPr>
+          <a:xfrm>
+            <a:off x="548640" y="8001000"/>
+            <a:ext cx="22677120" cy="1051560"/>
+          </a:xfrm>
+          <a:prstGeom prst="rect">
+            <a:avLst/>
+          </a:prstGeom>
+          <a:noFill/>
+        </p:spPr>
+        <p:txBody>
+          <a:bodyPr wrap="square">
+            <a:spAutoFit/>
+          </a:bodyPr>
+          <a:lstStyle/>
+          <a:p>
+            <a:pPr algn="l"/>
+            <a:r>
+              <a:rPr sz="1250" i="0">
+                <a:solidFill>
+                  <a:srgbClr val="1F3864"/>
+                </a:solidFill>
+                <a:latin typeface="Calibri"/>
+              </a:rPr>
+              <a:t>Minimal sufficient adjustment set, Z (10 variables): {Maternal age, Race/ethnicity, Education, Prenatal-care timing, WIC participation, Parity, Prior preterm birth, Pre-pregnancy diabetes, Pre-pregnancy hypertension, Pre-pregnancy BMI}. Sufficient: conditioning on Z blocks all 10 backdoor paths above (each Xi sits on exactly one). Minimal: no Xi can be dropped from Z, since each is the only node on its own backdoor path — dropping it leaves that path unblocked; and Z contains no mediator or collider of T → Y, so nothing in Z should be dropped for that reason either.</a:t>
+            </a:r>
+          </a:p>
+        </p:txBody>
+      </p:sp>
+      <p:sp>
+        <p:nvSpPr>
           <p:cNvPr id="39" name="TextBox 38"/>
           <p:cNvSpPr txBox="1"/>
           <p:nvPr/>
         </p:nvSpPr>
         <p:spPr>
           <a:xfrm>
-            <a:off x="8961120" y="6537960"/>
-            <a:ext cx="5852160" cy="365760"/>
+            <a:off x="548640" y="9098280"/>
+            <a:ext cx="22677120" cy="822960"/>
           </a:xfrm>
           <a:prstGeom prst="rect">
             <a:avLst/>
@@ -5011,127 +4963,20 @@
           <a:p>
             <a:pPr algn="l"/>
             <a:r>
-              <a:rPr sz="1300" i="1">
-                <a:solidFill>
-                  <a:srgbClr val="C1611A"/>
+              <a:rPr sz="1200" i="1">
+                <a:solidFill>
+                  <a:srgbClr val="555555"/>
                 </a:solidFill>
                 <a:latin typeface="Calibri"/>
               </a:rPr>
-              <a:t>Causal path of interest (odds ratio, adjusted / weighted)</a:t>
-            </a:r>
-          </a:p>
-        </p:txBody>
-      </p:sp>
-      <p:sp>
-        <p:nvSpPr>
-          <p:cNvPr id="40" name="TextBox 39"/>
-          <p:cNvSpPr txBox="1"/>
-          <p:nvPr/>
-        </p:nvSpPr>
-        <p:spPr>
-          <a:xfrm>
-            <a:off x="548640" y="7040880"/>
-            <a:ext cx="22677120" cy="1188720"/>
-          </a:xfrm>
-          <a:prstGeom prst="rect">
-            <a:avLst/>
-          </a:prstGeom>
-          <a:noFill/>
-        </p:spPr>
-        <p:txBody>
-          <a:bodyPr wrap="square">
-            <a:spAutoFit/>
-          </a:bodyPr>
-          <a:lstStyle/>
-          <a:p>
-            <a:pPr algn="l"/>
-            <a:r>
-              <a:rPr sz="1350" i="0">
-                <a:solidFill>
-                  <a:srgbClr val="1A2233"/>
-                </a:solidFill>
-                <a:latin typeface="Calibri"/>
-              </a:rPr>
-              <a:t>Paths in this diagram — 12 total, all blocked or estimated once the propensity-score adjustment is applied:
-•  1 causal path:  T → Y  (the effect being estimated)
-•  11 backdoor paths, one per confounder Xi:  T ← Xi → Y  (each is blocked by conditioning on Xi in the propensity-score model)</a:t>
-            </a:r>
-          </a:p>
-        </p:txBody>
-      </p:sp>
-      <p:sp>
-        <p:nvSpPr>
-          <p:cNvPr id="41" name="TextBox 40"/>
-          <p:cNvSpPr txBox="1"/>
-          <p:nvPr/>
-        </p:nvSpPr>
-        <p:spPr>
-          <a:xfrm>
-            <a:off x="548640" y="8001000"/>
-            <a:ext cx="22677120" cy="1051560"/>
-          </a:xfrm>
-          <a:prstGeom prst="rect">
-            <a:avLst/>
-          </a:prstGeom>
-          <a:noFill/>
-        </p:spPr>
-        <p:txBody>
-          <a:bodyPr wrap="square">
-            <a:spAutoFit/>
-          </a:bodyPr>
-          <a:lstStyle/>
-          <a:p>
-            <a:pPr algn="l"/>
-            <a:r>
-              <a:rPr sz="1250" i="0">
-                <a:solidFill>
-                  <a:srgbClr val="1F3864"/>
-                </a:solidFill>
-                <a:latin typeface="Calibri"/>
-              </a:rPr>
-              <a:t>Minimal sufficient adjustment set, Z (11 variables): {Maternal age, Race/ethnicity, Education, Prenatal-care timing, WIC participation, Parity, Prior preterm birth, Pre-pregnancy diabetes, Pre-pregnancy hypertension, Pre-pregnancy BMI, Insurance/payer type}. Sufficient: conditioning on Z blocks all 11 backdoor paths above (each Xi sits on exactly one). Minimal: no Xi can be dropped from Z, since each is the only node on its own backdoor path — dropping it leaves that path unblocked; and Z contains no mediator or collider of T → Y, so nothing in Z should be dropped for that reason either.</a:t>
-            </a:r>
-          </a:p>
-        </p:txBody>
-      </p:sp>
-      <p:sp>
-        <p:nvSpPr>
-          <p:cNvPr id="42" name="TextBox 41"/>
-          <p:cNvSpPr txBox="1"/>
-          <p:nvPr/>
-        </p:nvSpPr>
-        <p:spPr>
-          <a:xfrm>
-            <a:off x="548640" y="9098280"/>
-            <a:ext cx="22677120" cy="822960"/>
-          </a:xfrm>
-          <a:prstGeom prst="rect">
-            <a:avLst/>
-          </a:prstGeom>
-          <a:noFill/>
-        </p:spPr>
-        <p:txBody>
-          <a:bodyPr wrap="square">
-            <a:spAutoFit/>
-          </a:bodyPr>
-          <a:lstStyle/>
-          <a:p>
-            <a:pPr algn="l"/>
-            <a:r>
-              <a:rPr sz="1200" i="1">
-                <a:solidFill>
-                  <a:srgbClr val="555555"/>
-                </a:solidFill>
-                <a:latin typeface="Calibri"/>
-              </a:rPr>
-              <a:t>All 11 confounders are direct parents of both T and Y, so conditioning on each one blocks every backdoor path shown here. A second, supplementary diagram (next slide) shows an assumed ordering AMONG the confounders themselves; see its note for why those additional indirect paths do not require separate treatment.</a:t>
-            </a:r>
-          </a:p>
-        </p:txBody>
-      </p:sp>
-      <p:sp>
-        <p:nvSpPr>
-          <p:cNvPr id="43" name="Rounded Rectangle 42"/>
+              <a:t>Each edge into T above was individually defended (not defaulted): a node is a parent of T only if it plausibly influences smoking behavior itself, not merely the outcome. Insurance/payer type was considered and excluded on exactly this test — see the proposal text for the full node-by-node defense, including why it is still discussed despite its empirical correlation with smoking. A second, supplementary diagram (next slide) shows an assumed ordering AMONG the confounders themselves; see its note for why those additional indirect paths do not require separate treatment.</a:t>
+            </a:r>
+          </a:p>
+        </p:txBody>
+      </p:sp>
+      <p:sp>
+        <p:nvSpPr>
+          <p:cNvPr id="40" name="Rounded Rectangle 39"/>
           <p:cNvSpPr/>
           <p:nvPr/>
         </p:nvSpPr>
@@ -5177,7 +5022,7 @@
       </p:sp>
       <p:sp>
         <p:nvSpPr>
-          <p:cNvPr id="44" name="TextBox 43"/>
+          <p:cNvPr id="41" name="TextBox 40"/>
           <p:cNvSpPr txBox="1"/>
           <p:nvPr/>
         </p:nvSpPr>
@@ -5211,7 +5056,7 @@
       </p:sp>
       <p:sp>
         <p:nvSpPr>
-          <p:cNvPr id="45" name="Rounded Rectangle 44"/>
+          <p:cNvPr id="42" name="Rounded Rectangle 41"/>
           <p:cNvSpPr/>
           <p:nvPr/>
         </p:nvSpPr>
@@ -5257,7 +5102,7 @@
       </p:sp>
       <p:sp>
         <p:nvSpPr>
-          <p:cNvPr id="46" name="TextBox 45"/>
+          <p:cNvPr id="43" name="TextBox 42"/>
           <p:cNvSpPr txBox="1"/>
           <p:nvPr/>
         </p:nvSpPr>
@@ -5291,7 +5136,7 @@
       </p:sp>
       <p:sp>
         <p:nvSpPr>
-          <p:cNvPr id="47" name="Rounded Rectangle 46"/>
+          <p:cNvPr id="44" name="Rounded Rectangle 43"/>
           <p:cNvSpPr/>
           <p:nvPr/>
         </p:nvSpPr>
@@ -5337,7 +5182,7 @@
       </p:sp>
       <p:sp>
         <p:nvSpPr>
-          <p:cNvPr id="48" name="TextBox 47"/>
+          <p:cNvPr id="45" name="TextBox 44"/>
           <p:cNvSpPr txBox="1"/>
           <p:nvPr/>
         </p:nvSpPr>
@@ -5417,7 +5262,7 @@
                 </a:solidFill>
                 <a:latin typeface="Calibri"/>
               </a:rPr>
-              <a:t>Supplementary: Assumed Ordering Among the 11 Confounders (Not Part of the Adjustment-Set Argument)</a:t>
+              <a:t>Supplementary: Assumed Ordering Among the 10 Confounders (Not Part of the Adjustment-Set Argument)</a:t>
             </a:r>
           </a:p>
         </p:txBody>
@@ -5741,7 +5586,7 @@
         </p:nvSpPr>
         <p:spPr>
           <a:xfrm>
-            <a:off x="2176272" y="4572000"/>
+            <a:off x="2697479" y="4572000"/>
             <a:ext cx="2743200" cy="960120"/>
           </a:xfrm>
           <a:prstGeom prst="roundRect">
@@ -5787,7 +5632,7 @@
                 </a:solidFill>
                 <a:latin typeface="Calibri"/>
               </a:rPr>
-              <a:t>Insurance /</a:t>
+              <a:t>WIC</a:t>
             </a:r>
           </a:p>
           <a:p>
@@ -5803,7 +5648,7 @@
                 </a:solidFill>
                 <a:latin typeface="Calibri"/>
               </a:rPr>
-              <a:t>payer type</a:t>
+              <a:t>participation</a:t>
             </a:r>
           </a:p>
         </p:txBody>
@@ -5816,7 +5661,7 @@
         </p:nvSpPr>
         <p:spPr>
           <a:xfrm>
-            <a:off x="6345936" y="4572000"/>
+            <a:off x="7909559" y="4572000"/>
             <a:ext cx="2743200" cy="960120"/>
           </a:xfrm>
           <a:prstGeom prst="roundRect">
@@ -5862,7 +5707,7 @@
                 </a:solidFill>
                 <a:latin typeface="Calibri"/>
               </a:rPr>
-              <a:t>WIC</a:t>
+              <a:t>Pre-pregnancy</a:t>
             </a:r>
           </a:p>
           <a:p>
@@ -5878,7 +5723,7 @@
                 </a:solidFill>
                 <a:latin typeface="Calibri"/>
               </a:rPr>
-              <a:t>participation</a:t>
+              <a:t>diabetes</a:t>
             </a:r>
           </a:p>
         </p:txBody>
@@ -5891,7 +5736,7 @@
         </p:nvSpPr>
         <p:spPr>
           <a:xfrm>
-            <a:off x="10515599" y="4572000"/>
+            <a:off x="13121639" y="4572000"/>
             <a:ext cx="2743200" cy="960120"/>
           </a:xfrm>
           <a:prstGeom prst="roundRect">
@@ -5953,7 +5798,7 @@
                 </a:solidFill>
                 <a:latin typeface="Calibri"/>
               </a:rPr>
-              <a:t>diabetes</a:t>
+              <a:t>hypertension</a:t>
             </a:r>
           </a:p>
         </p:txBody>
@@ -5966,7 +5811,7 @@
         </p:nvSpPr>
         <p:spPr>
           <a:xfrm>
-            <a:off x="14685263" y="4572000"/>
+            <a:off x="18333719" y="4572000"/>
             <a:ext cx="2743200" cy="960120"/>
           </a:xfrm>
           <a:prstGeom prst="roundRect">
@@ -6012,7 +5857,7 @@
                 </a:solidFill>
                 <a:latin typeface="Calibri"/>
               </a:rPr>
-              <a:t>Pre-pregnancy</a:t>
+              <a:t>Prior preterm</a:t>
             </a:r>
           </a:p>
           <a:p>
@@ -6028,7 +5873,7 @@
                 </a:solidFill>
                 <a:latin typeface="Calibri"/>
               </a:rPr>
-              <a:t>hypertension</a:t>
+              <a:t>birth</a:t>
             </a:r>
           </a:p>
         </p:txBody>
@@ -6041,7 +5886,7 @@
         </p:nvSpPr>
         <p:spPr>
           <a:xfrm>
-            <a:off x="18854928" y="4572000"/>
+            <a:off x="10515599" y="6400800"/>
             <a:ext cx="2743200" cy="960120"/>
           </a:xfrm>
           <a:prstGeom prst="roundRect">
@@ -6087,7 +5932,7 @@
                 </a:solidFill>
                 <a:latin typeface="Calibri"/>
               </a:rPr>
-              <a:t>Prior preterm</a:t>
+              <a:t>Prenatal care</a:t>
             </a:r>
           </a:p>
           <a:p>
@@ -6103,81 +5948,6 @@
                 </a:solidFill>
                 <a:latin typeface="Calibri"/>
               </a:rPr>
-              <a:t>birth</a:t>
-            </a:r>
-          </a:p>
-        </p:txBody>
-      </p:sp>
-      <p:sp>
-        <p:nvSpPr>
-          <p:cNvPr id="13" name="Rounded Rectangle 12"/>
-          <p:cNvSpPr/>
-          <p:nvPr/>
-        </p:nvSpPr>
-        <p:spPr>
-          <a:xfrm>
-            <a:off x="10515599" y="6400800"/>
-            <a:ext cx="2743200" cy="960120"/>
-          </a:xfrm>
-          <a:prstGeom prst="roundRect">
-            <a:avLst/>
-          </a:prstGeom>
-          <a:solidFill>
-            <a:srgbClr val="EEF2F7"/>
-          </a:solidFill>
-          <a:ln w="19050">
-            <a:solidFill>
-              <a:srgbClr val="6B7F99"/>
-            </a:solidFill>
-          </a:ln>
-          <a:effectLst/>
-        </p:spPr>
-        <p:style>
-          <a:lnRef idx="1">
-            <a:schemeClr val="accent1"/>
-          </a:lnRef>
-          <a:fillRef idx="3">
-            <a:schemeClr val="accent1"/>
-          </a:fillRef>
-          <a:effectRef idx="2">
-            <a:schemeClr val="accent1"/>
-          </a:effectRef>
-          <a:fontRef idx="minor">
-            <a:schemeClr val="lt1"/>
-          </a:fontRef>
-        </p:style>
-        <p:txBody>
-          <a:bodyPr rtlCol="0" anchor="ctr" wrap="square" lIns="54864" rIns="54864" tIns="36576" bIns="36576"/>
-          <a:lstStyle/>
-          <a:p>
-            <a:pPr algn="ctr">
-              <a:lnSpc>
-                <a:spcPct val="100000"/>
-              </a:lnSpc>
-            </a:pPr>
-            <a:r>
-              <a:rPr sz="1250" b="0">
-                <a:solidFill>
-                  <a:srgbClr val="1A2233"/>
-                </a:solidFill>
-                <a:latin typeface="Calibri"/>
-              </a:rPr>
-              <a:t>Prenatal care</a:t>
-            </a:r>
-          </a:p>
-          <a:p>
-            <a:pPr algn="ctr">
-              <a:lnSpc>
-                <a:spcPct val="100000"/>
-              </a:lnSpc>
-            </a:pPr>
-            <a:r>
-              <a:rPr sz="1250" b="0">
-                <a:solidFill>
-                  <a:srgbClr val="1A2233"/>
-                </a:solidFill>
-                <a:latin typeface="Calibri"/>
-              </a:rPr>
               <a:t>timing</a:t>
             </a:r>
           </a:p>
@@ -6185,7 +5955,7 @@
       </p:sp>
       <p:cxnSp>
         <p:nvCxnSpPr>
-          <p:cNvPr id="14" name="Connector 13"/>
+          <p:cNvPr id="13" name="Connector 12"/>
           <p:cNvCxnSpPr>
             <a:stCxn id="3" idx="1"/>
             <a:endCxn id="5" idx="0"/>
@@ -6196,6 +5966,47 @@
           <a:xfrm flipH="1">
             <a:off x="4937759" y="1394460"/>
             <a:ext cx="365760" cy="1348740"/>
+          </a:xfrm>
+          <a:prstGeom prst="line">
+            <a:avLst/>
+          </a:prstGeom>
+          <a:ln w="22225">
+            <a:solidFill>
+              <a:srgbClr val="2F5C8A"/>
+            </a:solidFill>
+            <a:tailEnd type="triangle" w="med" len="med"/>
+            <a:prstDash val="dash"/>
+          </a:ln>
+          <a:effectLst/>
+        </p:spPr>
+        <p:style>
+          <a:lnRef idx="2">
+            <a:schemeClr val="accent1"/>
+          </a:lnRef>
+          <a:fillRef idx="0">
+            <a:schemeClr val="accent1"/>
+          </a:fillRef>
+          <a:effectRef idx="1">
+            <a:schemeClr val="accent1"/>
+          </a:effectRef>
+          <a:fontRef idx="minor">
+            <a:schemeClr val="tx1"/>
+          </a:fontRef>
+        </p:style>
+      </p:cxnSp>
+      <p:cxnSp>
+        <p:nvCxnSpPr>
+          <p:cNvPr id="14" name="Connector 13"/>
+          <p:cNvCxnSpPr>
+            <a:stCxn id="4" idx="1"/>
+            <a:endCxn id="7" idx="0"/>
+          </p:cNvCxnSpPr>
+          <p:nvPr/>
+        </p:nvCxnSpPr>
+        <p:spPr>
+          <a:xfrm>
+            <a:off x="15727680" y="1394460"/>
+            <a:ext cx="3108959" cy="1348740"/>
           </a:xfrm>
           <a:prstGeom prst="line">
             <a:avLst/>
@@ -6228,15 +6039,15 @@
         <p:nvCxnSpPr>
           <p:cNvPr id="15" name="Connector 14"/>
           <p:cNvCxnSpPr>
-            <a:stCxn id="3" idx="1"/>
-            <a:endCxn id="8" idx="0"/>
+            <a:stCxn id="4" idx="1"/>
+            <a:endCxn id="6" idx="0"/>
           </p:cNvCxnSpPr>
           <p:nvPr/>
         </p:nvCxnSpPr>
         <p:spPr>
           <a:xfrm flipH="1">
-            <a:off x="3547872" y="1394460"/>
-            <a:ext cx="1755647" cy="3177540"/>
+            <a:off x="11887199" y="1394460"/>
+            <a:ext cx="3840481" cy="1348740"/>
           </a:xfrm>
           <a:prstGeom prst="line">
             <a:avLst/>
@@ -6269,15 +6080,15 @@
         <p:nvCxnSpPr>
           <p:cNvPr id="16" name="Connector 15"/>
           <p:cNvCxnSpPr>
-            <a:stCxn id="4" idx="1"/>
-            <a:endCxn id="7" idx="0"/>
+            <a:stCxn id="5" idx="1"/>
+            <a:endCxn id="8" idx="0"/>
           </p:cNvCxnSpPr>
           <p:nvPr/>
         </p:nvCxnSpPr>
         <p:spPr>
           <a:xfrm>
-            <a:off x="15727680" y="1394460"/>
-            <a:ext cx="3108959" cy="1348740"/>
+            <a:off x="3566159" y="3223260"/>
+            <a:ext cx="502920" cy="1348740"/>
           </a:xfrm>
           <a:prstGeom prst="line">
             <a:avLst/>
@@ -6310,15 +6121,15 @@
         <p:nvCxnSpPr>
           <p:cNvPr id="17" name="Connector 16"/>
           <p:cNvCxnSpPr>
-            <a:stCxn id="4" idx="1"/>
-            <a:endCxn id="6" idx="0"/>
+            <a:stCxn id="6" idx="1"/>
+            <a:endCxn id="9" idx="0"/>
           </p:cNvCxnSpPr>
           <p:nvPr/>
         </p:nvCxnSpPr>
         <p:spPr>
           <a:xfrm flipH="1">
-            <a:off x="11887199" y="1394460"/>
-            <a:ext cx="3840481" cy="1348740"/>
+            <a:off x="9281159" y="3223260"/>
+            <a:ext cx="1234440" cy="1348740"/>
           </a:xfrm>
           <a:prstGeom prst="line">
             <a:avLst/>
@@ -6351,15 +6162,15 @@
         <p:nvCxnSpPr>
           <p:cNvPr id="18" name="Connector 17"/>
           <p:cNvCxnSpPr>
-            <a:stCxn id="5" idx="1"/>
-            <a:endCxn id="8" idx="0"/>
+            <a:stCxn id="6" idx="1"/>
+            <a:endCxn id="10" idx="0"/>
           </p:cNvCxnSpPr>
           <p:nvPr/>
         </p:nvCxnSpPr>
         <p:spPr>
-          <a:xfrm flipH="1">
-            <a:off x="3547872" y="3223260"/>
-            <a:ext cx="18287" cy="1348740"/>
+          <a:xfrm>
+            <a:off x="10515599" y="3223260"/>
+            <a:ext cx="3977640" cy="1348740"/>
           </a:xfrm>
           <a:prstGeom prst="line">
             <a:avLst/>
@@ -6392,15 +6203,15 @@
         <p:nvCxnSpPr>
           <p:cNvPr id="19" name="Connector 18"/>
           <p:cNvCxnSpPr>
-            <a:stCxn id="5" idx="1"/>
-            <a:endCxn id="9" idx="0"/>
+            <a:stCxn id="7" idx="1"/>
+            <a:endCxn id="11" idx="0"/>
           </p:cNvCxnSpPr>
           <p:nvPr/>
         </p:nvCxnSpPr>
         <p:spPr>
           <a:xfrm>
-            <a:off x="3566159" y="3223260"/>
-            <a:ext cx="4151377" cy="1348740"/>
+            <a:off x="17465039" y="3223260"/>
+            <a:ext cx="2240280" cy="1348740"/>
           </a:xfrm>
           <a:prstGeom prst="line">
             <a:avLst/>
@@ -6433,15 +6244,15 @@
         <p:nvCxnSpPr>
           <p:cNvPr id="20" name="Connector 19"/>
           <p:cNvCxnSpPr>
-            <a:stCxn id="6" idx="1"/>
-            <a:endCxn id="10" idx="0"/>
+            <a:stCxn id="8" idx="1"/>
+            <a:endCxn id="12" idx="0"/>
           </p:cNvCxnSpPr>
           <p:nvPr/>
         </p:nvCxnSpPr>
         <p:spPr>
           <a:xfrm>
-            <a:off x="10515599" y="3223260"/>
-            <a:ext cx="1371600" cy="1348740"/>
+            <a:off x="2697479" y="5052060"/>
+            <a:ext cx="9189720" cy="1348740"/>
           </a:xfrm>
           <a:prstGeom prst="line">
             <a:avLst/>
@@ -6470,173 +6281,9 @@
           </a:fontRef>
         </p:style>
       </p:cxnSp>
-      <p:cxnSp>
-        <p:nvCxnSpPr>
-          <p:cNvPr id="21" name="Connector 20"/>
-          <p:cNvCxnSpPr>
-            <a:stCxn id="6" idx="1"/>
-            <a:endCxn id="11" idx="0"/>
-          </p:cNvCxnSpPr>
-          <p:nvPr/>
-        </p:nvCxnSpPr>
-        <p:spPr>
-          <a:xfrm>
-            <a:off x="10515599" y="3223260"/>
-            <a:ext cx="5541264" cy="1348740"/>
-          </a:xfrm>
-          <a:prstGeom prst="line">
-            <a:avLst/>
-          </a:prstGeom>
-          <a:ln w="22225">
-            <a:solidFill>
-              <a:srgbClr val="2F5C8A"/>
-            </a:solidFill>
-            <a:tailEnd type="triangle" w="med" len="med"/>
-            <a:prstDash val="dash"/>
-          </a:ln>
-          <a:effectLst/>
-        </p:spPr>
-        <p:style>
-          <a:lnRef idx="2">
-            <a:schemeClr val="accent1"/>
-          </a:lnRef>
-          <a:fillRef idx="0">
-            <a:schemeClr val="accent1"/>
-          </a:fillRef>
-          <a:effectRef idx="1">
-            <a:schemeClr val="accent1"/>
-          </a:effectRef>
-          <a:fontRef idx="minor">
-            <a:schemeClr val="tx1"/>
-          </a:fontRef>
-        </p:style>
-      </p:cxnSp>
-      <p:cxnSp>
-        <p:nvCxnSpPr>
-          <p:cNvPr id="22" name="Connector 21"/>
-          <p:cNvCxnSpPr>
-            <a:stCxn id="7" idx="1"/>
-            <a:endCxn id="12" idx="0"/>
-          </p:cNvCxnSpPr>
-          <p:nvPr/>
-        </p:nvCxnSpPr>
-        <p:spPr>
-          <a:xfrm>
-            <a:off x="17465039" y="3223260"/>
-            <a:ext cx="2761489" cy="1348740"/>
-          </a:xfrm>
-          <a:prstGeom prst="line">
-            <a:avLst/>
-          </a:prstGeom>
-          <a:ln w="22225">
-            <a:solidFill>
-              <a:srgbClr val="2F5C8A"/>
-            </a:solidFill>
-            <a:tailEnd type="triangle" w="med" len="med"/>
-            <a:prstDash val="dash"/>
-          </a:ln>
-          <a:effectLst/>
-        </p:spPr>
-        <p:style>
-          <a:lnRef idx="2">
-            <a:schemeClr val="accent1"/>
-          </a:lnRef>
-          <a:fillRef idx="0">
-            <a:schemeClr val="accent1"/>
-          </a:fillRef>
-          <a:effectRef idx="1">
-            <a:schemeClr val="accent1"/>
-          </a:effectRef>
-          <a:fontRef idx="minor">
-            <a:schemeClr val="tx1"/>
-          </a:fontRef>
-        </p:style>
-      </p:cxnSp>
-      <p:cxnSp>
-        <p:nvCxnSpPr>
-          <p:cNvPr id="23" name="Connector 22"/>
-          <p:cNvCxnSpPr>
-            <a:stCxn id="8" idx="1"/>
-            <a:endCxn id="13" idx="0"/>
-          </p:cNvCxnSpPr>
-          <p:nvPr/>
-        </p:nvCxnSpPr>
-        <p:spPr>
-          <a:xfrm>
-            <a:off x="2176272" y="5052060"/>
-            <a:ext cx="9710927" cy="1348740"/>
-          </a:xfrm>
-          <a:prstGeom prst="line">
-            <a:avLst/>
-          </a:prstGeom>
-          <a:ln w="22225">
-            <a:solidFill>
-              <a:srgbClr val="2F5C8A"/>
-            </a:solidFill>
-            <a:tailEnd type="triangle" w="med" len="med"/>
-            <a:prstDash val="dash"/>
-          </a:ln>
-          <a:effectLst/>
-        </p:spPr>
-        <p:style>
-          <a:lnRef idx="2">
-            <a:schemeClr val="accent1"/>
-          </a:lnRef>
-          <a:fillRef idx="0">
-            <a:schemeClr val="accent1"/>
-          </a:fillRef>
-          <a:effectRef idx="1">
-            <a:schemeClr val="accent1"/>
-          </a:effectRef>
-          <a:fontRef idx="minor">
-            <a:schemeClr val="tx1"/>
-          </a:fontRef>
-        </p:style>
-      </p:cxnSp>
-      <p:cxnSp>
-        <p:nvCxnSpPr>
-          <p:cNvPr id="24" name="Connector 23"/>
-          <p:cNvCxnSpPr>
-            <a:stCxn id="9" idx="1"/>
-            <a:endCxn id="13" idx="0"/>
-          </p:cNvCxnSpPr>
-          <p:nvPr/>
-        </p:nvCxnSpPr>
-        <p:spPr>
-          <a:xfrm>
-            <a:off x="6345936" y="5052060"/>
-            <a:ext cx="5541263" cy="1348740"/>
-          </a:xfrm>
-          <a:prstGeom prst="line">
-            <a:avLst/>
-          </a:prstGeom>
-          <a:ln w="22225">
-            <a:solidFill>
-              <a:srgbClr val="2F5C8A"/>
-            </a:solidFill>
-            <a:tailEnd type="triangle" w="med" len="med"/>
-            <a:prstDash val="dash"/>
-          </a:ln>
-          <a:effectLst/>
-        </p:spPr>
-        <p:style>
-          <a:lnRef idx="2">
-            <a:schemeClr val="accent1"/>
-          </a:lnRef>
-          <a:fillRef idx="0">
-            <a:schemeClr val="accent1"/>
-          </a:fillRef>
-          <a:effectRef idx="1">
-            <a:schemeClr val="accent1"/>
-          </a:effectRef>
-          <a:fontRef idx="minor">
-            <a:schemeClr val="tx1"/>
-          </a:fontRef>
-        </p:style>
-      </p:cxnSp>
-      <p:sp>
-        <p:nvSpPr>
-          <p:cNvPr id="25" name="TextBox 24"/>
+      <p:sp>
+        <p:nvSpPr>
+          <p:cNvPr id="21" name="TextBox 20"/>
           <p:cNvSpPr txBox="1"/>
           <p:nvPr/>
         </p:nvSpPr>

--- a/dag/DAG_Editable.pptx
+++ b/dag/DAG_Editable.pptx
@@ -6283,14 +6283,145 @@
       </p:cxnSp>
       <p:sp>
         <p:nvSpPr>
-          <p:cNvPr id="21" name="TextBox 20"/>
+          <p:cNvPr id="21" name="Rounded Rectangle 20"/>
+          <p:cNvSpPr/>
+          <p:nvPr/>
+        </p:nvSpPr>
+        <p:spPr>
+          <a:xfrm>
+            <a:off x="17922240" y="8366760"/>
+            <a:ext cx="2926080" cy="1234440"/>
+          </a:xfrm>
+          <a:prstGeom prst="roundRect">
+            <a:avLst/>
+          </a:prstGeom>
+          <a:solidFill>
+            <a:srgbClr val="FDE3D0"/>
+          </a:solidFill>
+          <a:ln w="25400">
+            <a:solidFill>
+              <a:srgbClr val="C1611A"/>
+            </a:solidFill>
+          </a:ln>
+          <a:effectLst/>
+        </p:spPr>
+        <p:style>
+          <a:lnRef idx="1">
+            <a:schemeClr val="accent1"/>
+          </a:lnRef>
+          <a:fillRef idx="3">
+            <a:schemeClr val="accent1"/>
+          </a:fillRef>
+          <a:effectRef idx="2">
+            <a:schemeClr val="accent1"/>
+          </a:effectRef>
+          <a:fontRef idx="minor">
+            <a:schemeClr val="lt1"/>
+          </a:fontRef>
+        </p:style>
+        <p:txBody>
+          <a:bodyPr rtlCol="0" anchor="t" wrap="square" lIns="54864" rIns="54864" tIns="36576" bIns="36576"/>
+          <a:lstStyle/>
+          <a:p>
+            <a:pPr algn="ctr">
+              <a:lnSpc>
+                <a:spcPct val="100000"/>
+              </a:lnSpc>
+            </a:pPr>
+            <a:r>
+              <a:rPr sz="1300" b="1">
+                <a:solidFill>
+                  <a:srgbClr val="C1611A"/>
+                </a:solidFill>
+                <a:latin typeface="Calibri"/>
+              </a:rPr>
+              <a:t>Maternal smoking</a:t>
+            </a:r>
+          </a:p>
+          <a:p>
+            <a:pPr algn="ctr">
+              <a:lnSpc>
+                <a:spcPct val="100000"/>
+              </a:lnSpc>
+            </a:pPr>
+            <a:r>
+              <a:rPr sz="1300" b="1">
+                <a:solidFill>
+                  <a:srgbClr val="C1611A"/>
+                </a:solidFill>
+                <a:latin typeface="Calibri"/>
+              </a:rPr>
+              <a:t>during pregnancy</a:t>
+            </a:r>
+          </a:p>
+          <a:p>
+            <a:pPr algn="ctr">
+              <a:lnSpc>
+                <a:spcPct val="100000"/>
+              </a:lnSpc>
+            </a:pPr>
+            <a:r>
+              <a:rPr sz="1300" b="1">
+                <a:solidFill>
+                  <a:srgbClr val="C1611A"/>
+                </a:solidFill>
+                <a:latin typeface="Calibri"/>
+              </a:rPr>
+              <a:t>(exposure, T)</a:t>
+            </a:r>
+          </a:p>
+        </p:txBody>
+      </p:sp>
+      <p:cxnSp>
+        <p:nvCxnSpPr>
+          <p:cNvPr id="22" name="Connector 21"/>
+          <p:cNvCxnSpPr>
+            <a:stCxn id="5" idx="2"/>
+            <a:endCxn id="21" idx="3"/>
+          </p:cNvCxnSpPr>
+          <p:nvPr/>
+        </p:nvCxnSpPr>
+        <p:spPr>
+          <a:xfrm>
+            <a:off x="4937759" y="3703320"/>
+            <a:ext cx="15910561" cy="5280660"/>
+          </a:xfrm>
+          <a:prstGeom prst="bentConnector3">
+            <a:avLst/>
+          </a:prstGeom>
+          <a:ln w="34925">
+            <a:solidFill>
+              <a:srgbClr val="C1611A"/>
+            </a:solidFill>
+            <a:tailEnd type="triangle" w="med" len="med"/>
+          </a:ln>
+          <a:effectLst/>
+        </p:spPr>
+        <p:style>
+          <a:lnRef idx="2">
+            <a:schemeClr val="accent1"/>
+          </a:lnRef>
+          <a:fillRef idx="0">
+            <a:schemeClr val="accent1"/>
+          </a:fillRef>
+          <a:effectRef idx="1">
+            <a:schemeClr val="accent1"/>
+          </a:effectRef>
+          <a:fontRef idx="minor">
+            <a:schemeClr val="tx1"/>
+          </a:fontRef>
+        </p:style>
+      </p:cxnSp>
+      <p:sp>
+        <p:nvSpPr>
+          <p:cNvPr id="23" name="TextBox 22"/>
           <p:cNvSpPr txBox="1"/>
           <p:nvPr/>
         </p:nvSpPr>
         <p:spPr>
           <a:xfrm>
-            <a:off x="548640" y="7955279"/>
-            <a:ext cx="22677120" cy="2011680"/>
+            <a:off x="548640" y="9784080"/>
+            <a:ext cx="22677120" cy="1371600"/>
           </a:xfrm>
           <a:prstGeom prst="rect">
             <a:avLst/>
@@ -6305,13 +6436,14 @@
           <a:p>
             <a:pPr algn="l"/>
             <a:r>
-              <a:rPr sz="1300" i="1">
+              <a:rPr sz="1250" i="1">
                 <a:solidFill>
                   <a:srgbClr val="555555"/>
                 </a:solidFill>
                 <a:latin typeface="Calibri"/>
               </a:rPr>
-              <a:t>Note. These steel-blue dashed arrows reflect an assumed temporal / conceptual ordering standard in the perinatal-epidemiology literature (e.g., sociodemographic factors treated as upstream of clinical risk factors) — they are NOT associations estimated from this dataset, and this diagram is not needed to justify the adjustment set. Why: every confounder here is still a direct parent of both T and Y (previous slide), so conditioning on each one individually blocks every path that passes through it, including any longer indirect path that runs through this ordering (a standard d-separation result: conditioning on a non-collider blocks every path through that node). No separate accounting of these indirect paths is required.</a:t>
+              <a:t>Note. These steel-blue dashed arrows reflect an assumed temporal / conceptual ordering standard in the perinatal-epidemiology literature (e.g., sociodemographic factors treated as upstream of clinical risk factors) — they are NOT associations estimated from this dataset, and this diagram is not needed to justify the adjustment set. Why: every confounder here is still a direct parent of both T and Y (previous slide), so conditioning on each one individually blocks every path that passes through it, including any longer indirect path that runs through this ordering (a standard d-separation result: conditioning on a non-collider blocks every path through that node). No separate accounting of these indirect paths is required.
+The solid orange arrow (Education → T) is the one edge into exposure drawn on this slide, shown here deliberately per Dr. Ghosh's feedback: education is the confounder whose edge into smoking is most directly defended in the proposal text, and showing it alongside the assumed ordering makes clear that this diagram's edges are not purely among confounders — one of them terminates in exposure itself. It does not add a 12th path: T ← Education → Y is already path (2) on slide 1.</a:t>
             </a:r>
           </a:p>
         </p:txBody>

--- a/dag/DAG_Editable.pptx
+++ b/dag/DAG_Editable.pptx
@@ -3119,7 +3119,7 @@
                 </a:solidFill>
                 <a:latin typeface="Calibri"/>
               </a:rPr>
-              <a:t>Identification DAG — 10 Backdoor Paths + 1 Causal Path (Maternal Smoking → Preterm Birth)</a:t>
+              <a:t>Identification DAG: 10 Backdoor Paths + 1 Causal Path (Maternal Smoking → Preterm Birth)</a:t>
             </a:r>
           </a:p>
         </p:txBody>
@@ -4897,7 +4897,7 @@
                 </a:solidFill>
                 <a:latin typeface="Calibri"/>
               </a:rPr>
-              <a:t>Paths in this diagram — 11 total, all blocked or estimated once the propensity-score adjustment is applied:
+              <a:t>Paths in this diagram: 11 total, all blocked or estimated once the propensity-score adjustment is applied.
 •  1 causal path:  T → Y  (the effect being estimated)
 •  10 backdoor paths, one per confounder Xi:  T ← Xi → Y  (each is blocked by conditioning on Xi in the propensity-score model)</a:t>
             </a:r>
@@ -4934,7 +4934,7 @@
                 </a:solidFill>
                 <a:latin typeface="Calibri"/>
               </a:rPr>
-              <a:t>Minimal sufficient adjustment set, Z (10 variables): {Maternal age, Race/ethnicity, Education, Prenatal-care timing, WIC participation, Parity, Prior preterm birth, Pre-pregnancy diabetes, Pre-pregnancy hypertension, Pre-pregnancy BMI}. Sufficient: conditioning on Z blocks all 10 backdoor paths above (each Xi sits on exactly one). Minimal: no Xi can be dropped from Z, since each is the only node on its own backdoor path — dropping it leaves that path unblocked; and Z contains no mediator or collider of T → Y, so nothing in Z should be dropped for that reason either.</a:t>
+              <a:t>Minimal sufficient adjustment set, Z (10 variables): {Maternal age, Race/ethnicity, Education, Prenatal-care timing, WIC participation, Parity, Prior preterm birth, Pre-pregnancy diabetes, Pre-pregnancy hypertension, Pre-pregnancy BMI}. Sufficient: conditioning on Z blocks all 10 backdoor paths above (each Xi sits on exactly one). Minimal: no Xi can be dropped from Z, since each is the only node on its own backdoor path, so dropping it leaves that path unblocked; and Z contains no mediator or collider of T → Y, so nothing in Z should be dropped for that reason either.</a:t>
             </a:r>
           </a:p>
         </p:txBody>
@@ -4969,7 +4969,7 @@
                 </a:solidFill>
                 <a:latin typeface="Calibri"/>
               </a:rPr>
-              <a:t>Each edge into T above was individually defended (not defaulted): a node is a parent of T only if it plausibly influences smoking behavior itself, not merely the outcome. Insurance/payer type was considered and excluded on exactly this test — see the proposal text for the full node-by-node defense, including why it is still discussed despite its empirical correlation with smoking. A second, supplementary diagram (next slide) shows an assumed ordering AMONG the confounders themselves; see its note for why those additional indirect paths do not require separate treatment.</a:t>
+              <a:t>Each edge into T above was individually defended (not defaulted): a node is a parent of T only if it plausibly influences smoking behavior itself, not merely the outcome. Insurance/payer type was considered and excluded on exactly this test; see the proposal text for the full node-by-node defense, including why it is still discussed despite its empirical correlation with smoking. A second, supplementary diagram (next slide) shows an assumed ordering among the confounders themselves; see its note for why those additional indirect paths do not require separate treatment.</a:t>
             </a:r>
           </a:p>
         </p:txBody>
@@ -6372,23 +6372,44 @@
           </a:p>
         </p:txBody>
       </p:sp>
-      <p:cxnSp>
-        <p:nvCxnSpPr>
-          <p:cNvPr id="22" name="Connector 21"/>
-          <p:cNvCxnSpPr>
-            <a:stCxn id="5" idx="2"/>
-            <a:endCxn id="21" idx="3"/>
-          </p:cNvCxnSpPr>
+      <p:sp>
+        <p:nvSpPr>
+          <p:cNvPr id="22" name="Freeform 21"/>
+          <p:cNvSpPr/>
           <p:nvPr/>
-        </p:nvCxnSpPr>
-        <p:spPr>
-          <a:xfrm>
-            <a:off x="4937759" y="3703320"/>
-            <a:ext cx="15910561" cy="5280660"/>
-          </a:xfrm>
-          <a:prstGeom prst="bentConnector3">
-            <a:avLst/>
-          </a:prstGeom>
+        </p:nvSpPr>
+        <p:spPr>
+          <a:xfrm>
+            <a:off x="6309359" y="3223260"/>
+            <a:ext cx="11612881" cy="5760720"/>
+          </a:xfrm>
+          <a:custGeom>
+            <a:avLst/>
+            <a:gdLst/>
+            <a:ahLst/>
+            <a:cxnLst/>
+            <a:rect l="l" t="t" r="r" b="b"/>
+            <a:pathLst>
+              <a:path w="11612881" h="5760720">
+                <a:moveTo>
+                  <a:pt x="0" y="0"/>
+                </a:moveTo>
+                <a:lnTo>
+                  <a:pt x="0" y="891540"/>
+                </a:lnTo>
+                <a:lnTo>
+                  <a:pt x="10607041" y="891540"/>
+                </a:lnTo>
+                <a:lnTo>
+                  <a:pt x="10607041" y="5760720"/>
+                </a:lnTo>
+                <a:lnTo>
+                  <a:pt x="11612881" y="5760720"/>
+                </a:lnTo>
+              </a:path>
+            </a:pathLst>
+          </a:custGeom>
+          <a:noFill/>
           <a:ln w="34925">
             <a:solidFill>
               <a:srgbClr val="C1611A"/>
@@ -6398,20 +6419,27 @@
           <a:effectLst/>
         </p:spPr>
         <p:style>
-          <a:lnRef idx="2">
+          <a:lnRef idx="1">
             <a:schemeClr val="accent1"/>
           </a:lnRef>
-          <a:fillRef idx="0">
+          <a:fillRef idx="3">
             <a:schemeClr val="accent1"/>
           </a:fillRef>
-          <a:effectRef idx="1">
+          <a:effectRef idx="2">
             <a:schemeClr val="accent1"/>
           </a:effectRef>
           <a:fontRef idx="minor">
-            <a:schemeClr val="tx1"/>
+            <a:schemeClr val="lt1"/>
           </a:fontRef>
         </p:style>
-      </p:cxnSp>
+        <p:txBody>
+          <a:bodyPr rtlCol="0" anchor="ctr"/>
+          <a:lstStyle/>
+          <a:p>
+            <a:pPr algn="ctr"/>
+          </a:p>
+        </p:txBody>
+      </p:sp>
       <p:sp>
         <p:nvSpPr>
           <p:cNvPr id="23" name="TextBox 22"/>
@@ -6442,8 +6470,8 @@
                 </a:solidFill>
                 <a:latin typeface="Calibri"/>
               </a:rPr>
-              <a:t>Note. These steel-blue dashed arrows reflect an assumed temporal / conceptual ordering standard in the perinatal-epidemiology literature (e.g., sociodemographic factors treated as upstream of clinical risk factors) — they are NOT associations estimated from this dataset, and this diagram is not needed to justify the adjustment set. Why: every confounder here is still a direct parent of both T and Y (previous slide), so conditioning on each one individually blocks every path that passes through it, including any longer indirect path that runs through this ordering (a standard d-separation result: conditioning on a non-collider blocks every path through that node). No separate accounting of these indirect paths is required.
-The solid orange arrow (Education → T) is the one edge into exposure drawn on this slide, shown here deliberately per Dr. Ghosh's feedback: education is the confounder whose edge into smoking is most directly defended in the proposal text, and showing it alongside the assumed ordering makes clear that this diagram's edges are not purely among confounders — one of them terminates in exposure itself. It does not add a 12th path: T ← Education → Y is already path (2) on slide 1.</a:t>
+              <a:t>Note. These steel-blue dashed arrows reflect an assumed temporal / conceptual ordering standard in the perinatal-epidemiology literature (e.g., sociodemographic factors treated as upstream of clinical risk factors); they are not associations estimated from this dataset, and this diagram is not needed to justify the adjustment set. Every confounder here is still a direct parent of both T and Y (previous slide), so conditioning on each one individually blocks every path that passes through it, including any longer indirect path that runs through this ordering (a standard d-separation result: conditioning on a non-collider blocks every path through that node). No separate accounting of these indirect paths is required.
+The solid orange arrow (Education → T) is the one edge into exposure drawn on this slide, shown here deliberately: education is the confounder whose edge into smoking is most directly defended in the proposal text, and showing it alongside the assumed ordering makes clear that this diagram's edges are not purely among confounders; one of them terminates in exposure itself. It does not add a twelfth path: T ← Education → Y is already path (2) on slide 1.</a:t>
             </a:r>
           </a:p>
         </p:txBody>
